--- a/src/Tests/Samples.VerifyPowerPoint.verified.pptx
+++ b/src/Tests/Samples.VerifyPowerPoint.verified.pptx
@@ -32639,13 +32639,7 @@
 </file>
 
 <file path=ppt/tags/tag1.xml><?xml version="1.0" encoding="utf-8"?>
-<p:tagLst xmlns:p="http://schemas.openxmlformats.org/presentationml/2006/main">
-  <p:tag name="AS_NET" val="10.0.12"/>
-  <p:tag name="AS_OS" val="Microsoft Windows NT 10.0.28000.0"/>
-  <p:tag name="AS_RELEASE_DATE" val="2026.10.14"/>
-  <p:tag name="AS_TITLE" val="Aspose.Slides for .NET6"/>
-  <p:tag name="AS_VERSION" val="26.10"/>
-</p:tagLst>
+<p:tagLst xmlns:p="http://schemas.openxmlformats.org/presentationml/2006/main"/>
 </file>
 
 <file path=ppt/theme/theme1.xml><?xml version="1.0" encoding="utf-8"?>
